--- a/outputs/tutoring/tsukasa/school-slides/deck_part4.pptx
+++ b/outputs/tutoring/tsukasa/school-slides/deck_part4.pptx
@@ -3089,52 +3089,9 @@
         <p:nvPr/>
       </p:nvGrpSpPr>
       <p:grpSpPr/>
-      <p:sp>
-        <p:nvSpPr>
-          <p:cNvPr id="2" name="Rectangle 1"/>
-          <p:cNvSpPr/>
-          <p:nvPr/>
-        </p:nvSpPr>
-        <p:spPr>
-          <a:xfrm>
-            <a:off x="0" y="0"/>
-            <a:ext cx="12191695" cy="6858000"/>
-          </a:xfrm>
-          <a:prstGeom prst="rect">
-            <a:avLst/>
-          </a:prstGeom>
-          <a:solidFill>
-            <a:srgbClr val="EAF7FB"/>
-          </a:solidFill>
-          <a:ln>
-            <a:noFill/>
-          </a:ln>
-        </p:spPr>
-        <p:style>
-          <a:lnRef idx="1">
-            <a:schemeClr val="accent1"/>
-          </a:lnRef>
-          <a:fillRef idx="3">
-            <a:schemeClr val="accent1"/>
-          </a:fillRef>
-          <a:effectRef idx="2">
-            <a:schemeClr val="accent1"/>
-          </a:effectRef>
-          <a:fontRef idx="minor">
-            <a:schemeClr val="lt1"/>
-          </a:fontRef>
-        </p:style>
-        <p:txBody>
-          <a:bodyPr rtlCol="0" anchor="ctr"/>
-          <a:lstStyle/>
-          <a:p>
-            <a:pPr algn="ctr"/>
-          </a:p>
-        </p:txBody>
-      </p:sp>
       <p:pic>
         <p:nvPicPr>
-          <p:cNvPr id="3" name="Picture 2" descr="wiki_campus_hero.jpg"/>
+          <p:cNvPr id="2" name="Picture 1" descr="wiki_campus_hero.jpg"/>
           <p:cNvPicPr>
             <a:picLocks noChangeAspect="1"/>
           </p:cNvPicPr>
@@ -3142,15 +3099,15 @@
         </p:nvPicPr>
         <p:blipFill>
           <a:blip r:embed="rId2"/>
-          <a:srcRect t="24173" b="24173"/>
+          <a:srcRect t="12163" b="12163"/>
           <a:stretch>
             <a:fillRect/>
           </a:stretch>
         </p:blipFill>
         <p:spPr>
           <a:xfrm>
-            <a:off x="676656" y="411480"/>
-            <a:ext cx="10835640" cy="4160520"/>
+            <a:off x="0" y="0"/>
+            <a:ext cx="12191695" cy="6858000"/>
           </a:xfrm>
           <a:prstGeom prst="rect">
             <a:avLst/>
@@ -3159,25 +3116,23 @@
       </p:pic>
       <p:sp>
         <p:nvSpPr>
-          <p:cNvPr id="4" name="Rounded Rectangle 3"/>
+          <p:cNvPr id="3" name="Rectangle 2"/>
           <p:cNvSpPr/>
           <p:nvPr/>
         </p:nvSpPr>
         <p:spPr>
           <a:xfrm>
-            <a:off x="676656" y="411480"/>
-            <a:ext cx="10835640" cy="4160520"/>
-          </a:xfrm>
-          <a:prstGeom prst="roundRect">
-            <a:avLst>
-              <a:gd name="adj" fmla="val 4000"/>
-            </a:avLst>
+            <a:off x="0" y="4892040"/>
+            <a:ext cx="12191695" cy="1965960"/>
+          </a:xfrm>
+          <a:prstGeom prst="rect">
+            <a:avLst/>
           </a:prstGeom>
-          <a:noFill/>
-          <a:ln w="12700">
-            <a:solidFill>
-              <a:srgbClr val="FFFFFF"/>
-            </a:solidFill>
+          <a:solidFill>
+            <a:srgbClr val="0A162A"/>
+          </a:solidFill>
+          <a:ln>
+            <a:noFill/>
           </a:ln>
         </p:spPr>
         <p:style>
@@ -3204,20 +3159,20 @@
       </p:sp>
       <p:sp>
         <p:nvSpPr>
-          <p:cNvPr id="5" name="Rectangle 4"/>
+          <p:cNvPr id="4" name="Rectangle 3"/>
           <p:cNvSpPr/>
           <p:nvPr/>
         </p:nvSpPr>
         <p:spPr>
           <a:xfrm>
-            <a:off x="0" y="4443984"/>
-            <a:ext cx="12191695" cy="2414016"/>
+            <a:off x="0" y="5056632"/>
+            <a:ext cx="12191695" cy="1801368"/>
           </a:xfrm>
           <a:prstGeom prst="rect">
             <a:avLst/>
           </a:prstGeom>
           <a:solidFill>
-            <a:srgbClr val="0F2A4F"/>
+            <a:srgbClr val="0A162A"/>
           </a:solidFill>
           <a:ln>
             <a:noFill/>
@@ -3247,20 +3202,20 @@
       </p:sp>
       <p:sp>
         <p:nvSpPr>
-          <p:cNvPr id="6" name="Rectangle 5"/>
+          <p:cNvPr id="5" name="Rectangle 4"/>
           <p:cNvSpPr/>
           <p:nvPr/>
         </p:nvSpPr>
         <p:spPr>
           <a:xfrm>
-            <a:off x="0" y="4443984"/>
-            <a:ext cx="12191695" cy="73152"/>
+            <a:off x="0" y="5221224"/>
+            <a:ext cx="12191695" cy="1636776"/>
           </a:xfrm>
           <a:prstGeom prst="rect">
             <a:avLst/>
           </a:prstGeom>
           <a:solidFill>
-            <a:srgbClr val="2E8FA3"/>
+            <a:srgbClr val="0A162A"/>
           </a:solidFill>
           <a:ln>
             <a:noFill/>
@@ -3290,14 +3245,57 @@
       </p:sp>
       <p:sp>
         <p:nvSpPr>
+          <p:cNvPr id="6" name="Rectangle 5"/>
+          <p:cNvSpPr/>
+          <p:nvPr/>
+        </p:nvSpPr>
+        <p:spPr>
+          <a:xfrm>
+            <a:off x="0" y="5385816"/>
+            <a:ext cx="12191695" cy="1472184"/>
+          </a:xfrm>
+          <a:prstGeom prst="rect">
+            <a:avLst/>
+          </a:prstGeom>
+          <a:solidFill>
+            <a:srgbClr val="0A162A"/>
+          </a:solidFill>
+          <a:ln>
+            <a:noFill/>
+          </a:ln>
+        </p:spPr>
+        <p:style>
+          <a:lnRef idx="1">
+            <a:schemeClr val="accent1"/>
+          </a:lnRef>
+          <a:fillRef idx="3">
+            <a:schemeClr val="accent1"/>
+          </a:fillRef>
+          <a:effectRef idx="2">
+            <a:schemeClr val="accent1"/>
+          </a:effectRef>
+          <a:fontRef idx="minor">
+            <a:schemeClr val="lt1"/>
+          </a:fontRef>
+        </p:style>
+        <p:txBody>
+          <a:bodyPr rtlCol="0" anchor="ctr"/>
+          <a:lstStyle/>
+          <a:p>
+            <a:pPr algn="ctr"/>
+          </a:p>
+        </p:txBody>
+      </p:sp>
+      <p:sp>
+        <p:nvSpPr>
           <p:cNvPr id="7" name="TextBox 6"/>
           <p:cNvSpPr txBox="1"/>
           <p:nvPr/>
         </p:nvSpPr>
         <p:spPr>
           <a:xfrm>
-            <a:off x="804672" y="4882896"/>
-            <a:ext cx="10607040" cy="658368"/>
+            <a:off x="685800" y="5285232"/>
+            <a:ext cx="10881360" cy="713232"/>
           </a:xfrm>
           <a:prstGeom prst="rect">
             <a:avLst/>
@@ -3316,7 +3314,7 @@
               </a:lnSpc>
             </a:pPr>
             <a:r>
-              <a:rPr sz="4200" b="1">
+              <a:rPr sz="4400" b="1">
                 <a:solidFill>
                   <a:srgbClr val="FFFFFF"/>
                 </a:solidFill>
@@ -3337,8 +3335,8 @@
         </p:nvSpPr>
         <p:spPr>
           <a:xfrm>
-            <a:off x="822960" y="5641848"/>
-            <a:ext cx="10149840" cy="347472"/>
+            <a:off x="713232" y="6071616"/>
+            <a:ext cx="10424160" cy="384048"/>
           </a:xfrm>
           <a:prstGeom prst="rect">
             <a:avLst/>
@@ -3365,7 +3363,7 @@
                 <a:ea typeface="Hiragino Sans"/>
                 <a:cs typeface="Hiragino Sans"/>
               </a:rPr>
-              <a:t>自分でテーマを決めて、とことん掘る学校</a:t>
+              <a:t>自分のテーマを、とことん掘れる学校。</a:t>
             </a:r>
           </a:p>
         </p:txBody>
@@ -3558,272 +3556,14 @@
       </p:sp>
       <p:sp>
         <p:nvSpPr>
-          <p:cNvPr id="6" name="Oval 5"/>
+          <p:cNvPr id="6" name="Rounded Rectangle 5"/>
           <p:cNvSpPr/>
           <p:nvPr/>
         </p:nvSpPr>
         <p:spPr>
           <a:xfrm>
-            <a:off x="658368" y="1600200"/>
-            <a:ext cx="182880" cy="182880"/>
-          </a:xfrm>
-          <a:prstGeom prst="ellipse">
-            <a:avLst/>
-          </a:prstGeom>
-          <a:solidFill>
-            <a:srgbClr val="2E8FA3"/>
-          </a:solidFill>
-          <a:ln w="9525">
-            <a:solidFill>
-              <a:srgbClr val="2E8FA3"/>
-            </a:solidFill>
-          </a:ln>
-        </p:spPr>
-        <p:style>
-          <a:lnRef idx="1">
-            <a:schemeClr val="accent1"/>
-          </a:lnRef>
-          <a:fillRef idx="3">
-            <a:schemeClr val="accent1"/>
-          </a:fillRef>
-          <a:effectRef idx="2">
-            <a:schemeClr val="accent1"/>
-          </a:effectRef>
-          <a:fontRef idx="minor">
-            <a:schemeClr val="lt1"/>
-          </a:fontRef>
-        </p:style>
-        <p:txBody>
-          <a:bodyPr rtlCol="0" anchor="ctr"/>
-          <a:lstStyle/>
-          <a:p>
-            <a:pPr algn="ctr"/>
-          </a:p>
-        </p:txBody>
-      </p:sp>
-      <p:sp>
-        <p:nvSpPr>
-          <p:cNvPr id="7" name="TextBox 6"/>
-          <p:cNvSpPr txBox="1"/>
-          <p:nvPr/>
-        </p:nvSpPr>
-        <p:spPr>
-          <a:xfrm>
-            <a:off x="1170432" y="1481328"/>
-            <a:ext cx="5806440" cy="621792"/>
-          </a:xfrm>
-          <a:prstGeom prst="rect">
-            <a:avLst/>
-          </a:prstGeom>
-          <a:noFill/>
-        </p:spPr>
-        <p:txBody>
-          <a:bodyPr wrap="square" anchor="t" lIns="0" rIns="0" tIns="0" bIns="0">
-            <a:spAutoFit/>
-          </a:bodyPr>
-          <a:lstStyle/>
-          <a:p>
-            <a:pPr algn="l">
-              <a:lnSpc>
-                <a:spcPct val="115000"/>
-              </a:lnSpc>
-            </a:pPr>
-            <a:r>
-              <a:rPr sz="1700" b="1">
-                <a:solidFill>
-                  <a:srgbClr val="1A1A1A"/>
-                </a:solidFill>
-                <a:latin typeface="Hiragino Sans"/>
-                <a:ea typeface="Hiragino Sans"/>
-                <a:cs typeface="Hiragino Sans"/>
-              </a:rPr>
-              <a:t>校訓は「己を拓く」。校則はゆるめで、自主性を大事にする自由な空気</a:t>
-            </a:r>
-          </a:p>
-        </p:txBody>
-      </p:sp>
-      <p:sp>
-        <p:nvSpPr>
-          <p:cNvPr id="8" name="Oval 7"/>
-          <p:cNvSpPr/>
-          <p:nvPr/>
-        </p:nvSpPr>
-        <p:spPr>
-          <a:xfrm>
-            <a:off x="658368" y="2542032"/>
-            <a:ext cx="182880" cy="182880"/>
-          </a:xfrm>
-          <a:prstGeom prst="ellipse">
-            <a:avLst/>
-          </a:prstGeom>
-          <a:solidFill>
-            <a:srgbClr val="2E8FA3"/>
-          </a:solidFill>
-          <a:ln w="9525">
-            <a:solidFill>
-              <a:srgbClr val="2E8FA3"/>
-            </a:solidFill>
-          </a:ln>
-        </p:spPr>
-        <p:style>
-          <a:lnRef idx="1">
-            <a:schemeClr val="accent1"/>
-          </a:lnRef>
-          <a:fillRef idx="3">
-            <a:schemeClr val="accent1"/>
-          </a:fillRef>
-          <a:effectRef idx="2">
-            <a:schemeClr val="accent1"/>
-          </a:effectRef>
-          <a:fontRef idx="minor">
-            <a:schemeClr val="lt1"/>
-          </a:fontRef>
-        </p:style>
-        <p:txBody>
-          <a:bodyPr rtlCol="0" anchor="ctr"/>
-          <a:lstStyle/>
-          <a:p>
-            <a:pPr algn="ctr"/>
-          </a:p>
-        </p:txBody>
-      </p:sp>
-      <p:sp>
-        <p:nvSpPr>
-          <p:cNvPr id="9" name="TextBox 8"/>
-          <p:cNvSpPr txBox="1"/>
-          <p:nvPr/>
-        </p:nvSpPr>
-        <p:spPr>
-          <a:xfrm>
-            <a:off x="1170432" y="2423160"/>
-            <a:ext cx="5806440" cy="621792"/>
-          </a:xfrm>
-          <a:prstGeom prst="rect">
-            <a:avLst/>
-          </a:prstGeom>
-          <a:noFill/>
-        </p:spPr>
-        <p:txBody>
-          <a:bodyPr wrap="square" anchor="t" lIns="0" rIns="0" tIns="0" bIns="0">
-            <a:spAutoFit/>
-          </a:bodyPr>
-          <a:lstStyle/>
-          <a:p>
-            <a:pPr algn="l">
-              <a:lnSpc>
-                <a:spcPct val="115000"/>
-              </a:lnSpc>
-            </a:pPr>
-            <a:r>
-              <a:rPr sz="1700" b="1">
-                <a:solidFill>
-                  <a:srgbClr val="1A1A1A"/>
-                </a:solidFill>
-                <a:latin typeface="Hiragino Sans"/>
-                <a:ea typeface="Hiragino Sans"/>
-                <a:cs typeface="Hiragino Sans"/>
-              </a:rPr>
-              <a:t>理科の研究が特色（SSH）。「柏陽の知」で一年かけて自分のテーマを研究できる</a:t>
-            </a:r>
-          </a:p>
-        </p:txBody>
-      </p:sp>
-      <p:sp>
-        <p:nvSpPr>
-          <p:cNvPr id="10" name="Oval 9"/>
-          <p:cNvSpPr/>
-          <p:nvPr/>
-        </p:nvSpPr>
-        <p:spPr>
-          <a:xfrm>
-            <a:off x="658368" y="3483864"/>
-            <a:ext cx="182880" cy="182880"/>
-          </a:xfrm>
-          <a:prstGeom prst="ellipse">
-            <a:avLst/>
-          </a:prstGeom>
-          <a:solidFill>
-            <a:srgbClr val="2E8FA3"/>
-          </a:solidFill>
-          <a:ln w="9525">
-            <a:solidFill>
-              <a:srgbClr val="2E8FA3"/>
-            </a:solidFill>
-          </a:ln>
-        </p:spPr>
-        <p:style>
-          <a:lnRef idx="1">
-            <a:schemeClr val="accent1"/>
-          </a:lnRef>
-          <a:fillRef idx="3">
-            <a:schemeClr val="accent1"/>
-          </a:fillRef>
-          <a:effectRef idx="2">
-            <a:schemeClr val="accent1"/>
-          </a:effectRef>
-          <a:fontRef idx="minor">
-            <a:schemeClr val="lt1"/>
-          </a:fontRef>
-        </p:style>
-        <p:txBody>
-          <a:bodyPr rtlCol="0" anchor="ctr"/>
-          <a:lstStyle/>
-          <a:p>
-            <a:pPr algn="ctr"/>
-          </a:p>
-        </p:txBody>
-      </p:sp>
-      <p:sp>
-        <p:nvSpPr>
-          <p:cNvPr id="11" name="TextBox 10"/>
-          <p:cNvSpPr txBox="1"/>
-          <p:nvPr/>
-        </p:nvSpPr>
-        <p:spPr>
-          <a:xfrm>
-            <a:off x="1170432" y="3364992"/>
-            <a:ext cx="5806440" cy="621792"/>
-          </a:xfrm>
-          <a:prstGeom prst="rect">
-            <a:avLst/>
-          </a:prstGeom>
-          <a:noFill/>
-        </p:spPr>
-        <p:txBody>
-          <a:bodyPr wrap="square" anchor="t" lIns="0" rIns="0" tIns="0" bIns="0">
-            <a:spAutoFit/>
-          </a:bodyPr>
-          <a:lstStyle/>
-          <a:p>
-            <a:pPr algn="l">
-              <a:lnSpc>
-                <a:spcPct val="115000"/>
-              </a:lnSpc>
-            </a:pPr>
-            <a:r>
-              <a:rPr sz="1700" b="1">
-                <a:solidFill>
-                  <a:srgbClr val="1A1A1A"/>
-                </a:solidFill>
-                <a:latin typeface="Hiragino Sans"/>
-                <a:ea typeface="Hiragino Sans"/>
-                <a:cs typeface="Hiragino Sans"/>
-              </a:rPr>
-              <a:t>横浜・栄区、本郷台駅エリア（大船から根岸線で行ける）</a:t>
-            </a:r>
-          </a:p>
-        </p:txBody>
-      </p:sp>
-      <p:sp>
-        <p:nvSpPr>
-          <p:cNvPr id="12" name="Rounded Rectangle 11"/>
-          <p:cNvSpPr/>
-          <p:nvPr/>
-        </p:nvSpPr>
-        <p:spPr>
-          <a:xfrm>
-            <a:off x="658368" y="4709160"/>
-            <a:ext cx="6217920" cy="566928"/>
+            <a:off x="658368" y="1170432"/>
+            <a:ext cx="7315200" cy="1847088"/>
           </a:xfrm>
           <a:prstGeom prst="roundRect">
             <a:avLst>
@@ -3861,16 +3601,131 @@
           </a:p>
         </p:txBody>
       </p:sp>
-      <p:sp>
-        <p:nvSpPr>
-          <p:cNvPr id="13" name="TextBox 12"/>
+      <p:pic>
+        <p:nvPicPr>
+          <p:cNvPr id="7" name="Picture 6" descr="wiki_hongodai_card.jpg"/>
+          <p:cNvPicPr>
+            <a:picLocks noChangeAspect="1"/>
+          </p:cNvPicPr>
+          <p:nvPr/>
+        </p:nvPicPr>
+        <p:blipFill>
+          <a:blip r:embed="rId2"/>
+          <a:srcRect t="2928" b="2928"/>
+          <a:stretch>
+            <a:fillRect/>
+          </a:stretch>
+        </p:blipFill>
+        <p:spPr>
+          <a:xfrm>
+            <a:off x="731520" y="1243584"/>
+            <a:ext cx="7168896" cy="1700784"/>
+          </a:xfrm>
+          <a:prstGeom prst="rect">
+            <a:avLst/>
+          </a:prstGeom>
+        </p:spPr>
+      </p:pic>
+      <p:sp>
+        <p:nvSpPr>
+          <p:cNvPr id="8" name="Rounded Rectangle 7"/>
+          <p:cNvSpPr/>
+          <p:nvPr/>
+        </p:nvSpPr>
+        <p:spPr>
+          <a:xfrm>
+            <a:off x="731520" y="1243584"/>
+            <a:ext cx="7168896" cy="1700784"/>
+          </a:xfrm>
+          <a:prstGeom prst="roundRect">
+            <a:avLst>
+              <a:gd name="adj" fmla="val 4000"/>
+            </a:avLst>
+          </a:prstGeom>
+          <a:noFill/>
+          <a:ln w="12700">
+            <a:solidFill>
+              <a:srgbClr val="FFFFFF"/>
+            </a:solidFill>
+          </a:ln>
+        </p:spPr>
+        <p:style>
+          <a:lnRef idx="1">
+            <a:schemeClr val="accent1"/>
+          </a:lnRef>
+          <a:fillRef idx="3">
+            <a:schemeClr val="accent1"/>
+          </a:fillRef>
+          <a:effectRef idx="2">
+            <a:schemeClr val="accent1"/>
+          </a:effectRef>
+          <a:fontRef idx="minor">
+            <a:schemeClr val="lt1"/>
+          </a:fontRef>
+        </p:style>
+        <p:txBody>
+          <a:bodyPr rtlCol="0" anchor="ctr"/>
+          <a:lstStyle/>
+          <a:p>
+            <a:pPr algn="ctr"/>
+          </a:p>
+        </p:txBody>
+      </p:sp>
+      <p:sp>
+        <p:nvSpPr>
+          <p:cNvPr id="9" name="Rounded Rectangle 8"/>
+          <p:cNvSpPr/>
+          <p:nvPr/>
+        </p:nvSpPr>
+        <p:spPr>
+          <a:xfrm>
+            <a:off x="731520" y="2615184"/>
+            <a:ext cx="7168896" cy="329184"/>
+          </a:xfrm>
+          <a:prstGeom prst="roundRect">
+            <a:avLst>
+              <a:gd name="adj" fmla="val 6000"/>
+            </a:avLst>
+          </a:prstGeom>
+          <a:solidFill>
+            <a:srgbClr val="0A162A"/>
+          </a:solidFill>
+          <a:ln>
+            <a:noFill/>
+          </a:ln>
+        </p:spPr>
+        <p:style>
+          <a:lnRef idx="1">
+            <a:schemeClr val="accent1"/>
+          </a:lnRef>
+          <a:fillRef idx="3">
+            <a:schemeClr val="accent1"/>
+          </a:fillRef>
+          <a:effectRef idx="2">
+            <a:schemeClr val="accent1"/>
+          </a:effectRef>
+          <a:fontRef idx="minor">
+            <a:schemeClr val="lt1"/>
+          </a:fontRef>
+        </p:style>
+        <p:txBody>
+          <a:bodyPr rtlCol="0" anchor="ctr"/>
+          <a:lstStyle/>
+          <a:p>
+            <a:pPr algn="ctr"/>
+          </a:p>
+        </p:txBody>
+      </p:sp>
+      <p:sp>
+        <p:nvSpPr>
+          <p:cNvPr id="10" name="TextBox 9"/>
           <p:cNvSpPr txBox="1"/>
           <p:nvPr/>
         </p:nvSpPr>
         <p:spPr>
           <a:xfrm>
-            <a:off x="932688" y="4882896"/>
-            <a:ext cx="5669280" cy="219456"/>
+            <a:off x="859536" y="2670048"/>
+            <a:ext cx="6912864" cy="219456"/>
           </a:xfrm>
           <a:prstGeom prst="rect">
             <a:avLst/>
@@ -3889,29 +3744,29 @@
               </a:lnSpc>
             </a:pPr>
             <a:r>
-              <a:rPr sz="1500" b="1">
+              <a:rPr sz="900" b="1">
                 <a:solidFill>
-                  <a:srgbClr val="1E6575"/>
+                  <a:srgbClr val="FFFFFF"/>
                 </a:solidFill>
                 <a:latin typeface="Hiragino Sans"/>
                 <a:ea typeface="Hiragino Sans"/>
                 <a:cs typeface="Hiragino Sans"/>
               </a:rPr>
-              <a:t>JR根岸線「本郷台」駅から（大船から一本）</a:t>
-            </a:r>
-          </a:p>
-        </p:txBody>
-      </p:sp>
-      <p:sp>
-        <p:nvSpPr>
-          <p:cNvPr id="14" name="Rounded Rectangle 13"/>
+              <a:t>本郷台駅から通学</a:t>
+            </a:r>
+          </a:p>
+        </p:txBody>
+      </p:sp>
+      <p:sp>
+        <p:nvSpPr>
+          <p:cNvPr id="11" name="Rounded Rectangle 10"/>
           <p:cNvSpPr/>
           <p:nvPr/>
         </p:nvSpPr>
         <p:spPr>
           <a:xfrm>
-            <a:off x="7360920" y="1335024"/>
-            <a:ext cx="4224528" cy="2578608"/>
+            <a:off x="658368" y="3182112"/>
+            <a:ext cx="10863072" cy="566928"/>
           </a:xfrm>
           <a:prstGeom prst="roundRect">
             <a:avLst>
@@ -3949,51 +3804,26 @@
           </a:p>
         </p:txBody>
       </p:sp>
-      <p:pic>
-        <p:nvPicPr>
-          <p:cNvPr id="15" name="Picture 14" descr="wiki_campus_hero.jpg"/>
-          <p:cNvPicPr>
-            <a:picLocks noChangeAspect="1"/>
-          </p:cNvPicPr>
+      <p:sp>
+        <p:nvSpPr>
+          <p:cNvPr id="12" name="Oval 11"/>
+          <p:cNvSpPr/>
           <p:nvPr/>
-        </p:nvPicPr>
-        <p:blipFill>
-          <a:blip r:embed="rId2"/>
-          <a:srcRect t="9883" b="9883"/>
-          <a:stretch>
-            <a:fillRect/>
-          </a:stretch>
-        </p:blipFill>
-        <p:spPr>
-          <a:xfrm>
-            <a:off x="7434072" y="1408176"/>
-            <a:ext cx="4078224" cy="2432304"/>
-          </a:xfrm>
-          <a:prstGeom prst="rect">
+        </p:nvSpPr>
+        <p:spPr>
+          <a:xfrm>
+            <a:off x="896112" y="3383280"/>
+            <a:ext cx="146304" cy="146304"/>
+          </a:xfrm>
+          <a:prstGeom prst="ellipse">
             <a:avLst/>
           </a:prstGeom>
-        </p:spPr>
-      </p:pic>
-      <p:sp>
-        <p:nvSpPr>
-          <p:cNvPr id="16" name="Rounded Rectangle 15"/>
-          <p:cNvSpPr/>
-          <p:nvPr/>
-        </p:nvSpPr>
-        <p:spPr>
-          <a:xfrm>
-            <a:off x="7434072" y="1408176"/>
-            <a:ext cx="4078224" cy="2432304"/>
-          </a:xfrm>
-          <a:prstGeom prst="roundRect">
-            <a:avLst>
-              <a:gd name="adj" fmla="val 4000"/>
-            </a:avLst>
-          </a:prstGeom>
-          <a:noFill/>
-          <a:ln w="12700">
+          <a:solidFill>
+            <a:srgbClr val="2E8FA3"/>
+          </a:solidFill>
+          <a:ln w="9525">
             <a:solidFill>
-              <a:srgbClr val="FFFFFF"/>
+              <a:srgbClr val="2E8FA3"/>
             </a:solidFill>
           </a:ln>
         </p:spPr>
@@ -4021,14 +3851,55 @@
       </p:sp>
       <p:sp>
         <p:nvSpPr>
-          <p:cNvPr id="17" name="Rounded Rectangle 16"/>
+          <p:cNvPr id="13" name="TextBox 12"/>
+          <p:cNvSpPr txBox="1"/>
+          <p:nvPr/>
+        </p:nvSpPr>
+        <p:spPr>
+          <a:xfrm>
+            <a:off x="1207008" y="3255264"/>
+            <a:ext cx="9966960" cy="420624"/>
+          </a:xfrm>
+          <a:prstGeom prst="rect">
+            <a:avLst/>
+          </a:prstGeom>
+          <a:noFill/>
+        </p:spPr>
+        <p:txBody>
+          <a:bodyPr wrap="square" anchor="ctr" lIns="0" rIns="0" tIns="0" bIns="0">
+            <a:spAutoFit/>
+          </a:bodyPr>
+          <a:lstStyle/>
+          <a:p>
+            <a:pPr algn="l">
+              <a:lnSpc>
+                <a:spcPct val="98000"/>
+              </a:lnSpc>
+            </a:pPr>
+            <a:r>
+              <a:rPr sz="1040" b="1">
+                <a:solidFill>
+                  <a:srgbClr val="1A1A1A"/>
+                </a:solidFill>
+                <a:latin typeface="Hiragino Sans"/>
+                <a:ea typeface="Hiragino Sans"/>
+                <a:cs typeface="Hiragino Sans"/>
+              </a:rPr>
+              <a:t>理科の研究が特色（SSH）。「柏陽の知」で一年かけて、自分で決めたテーマを研究できる</a:t>
+            </a:r>
+          </a:p>
+        </p:txBody>
+      </p:sp>
+      <p:sp>
+        <p:nvSpPr>
+          <p:cNvPr id="14" name="Rounded Rectangle 13"/>
           <p:cNvSpPr/>
           <p:nvPr/>
         </p:nvSpPr>
         <p:spPr>
           <a:xfrm>
-            <a:off x="7434072" y="3511296"/>
-            <a:ext cx="4078224" cy="329184"/>
+            <a:off x="658368" y="3767328"/>
+            <a:ext cx="10863072" cy="566928"/>
           </a:xfrm>
           <a:prstGeom prst="roundRect">
             <a:avLst>
@@ -4036,10 +3907,12 @@
             </a:avLst>
           </a:prstGeom>
           <a:solidFill>
-            <a:srgbClr val="0A162A"/>
+            <a:srgbClr val="FFFFFF"/>
           </a:solidFill>
-          <a:ln>
-            <a:noFill/>
+          <a:ln w="9525">
+            <a:solidFill>
+              <a:srgbClr val="D7DDE8"/>
+            </a:solidFill>
           </a:ln>
         </p:spPr>
         <p:style>
@@ -4066,14 +3939,413 @@
       </p:sp>
       <p:sp>
         <p:nvSpPr>
-          <p:cNvPr id="18" name="TextBox 17"/>
+          <p:cNvPr id="15" name="Oval 14"/>
+          <p:cNvSpPr/>
+          <p:nvPr/>
+        </p:nvSpPr>
+        <p:spPr>
+          <a:xfrm>
+            <a:off x="896112" y="3968496"/>
+            <a:ext cx="146304" cy="146304"/>
+          </a:xfrm>
+          <a:prstGeom prst="ellipse">
+            <a:avLst/>
+          </a:prstGeom>
+          <a:solidFill>
+            <a:srgbClr val="2E8FA3"/>
+          </a:solidFill>
+          <a:ln w="9525">
+            <a:solidFill>
+              <a:srgbClr val="2E8FA3"/>
+            </a:solidFill>
+          </a:ln>
+        </p:spPr>
+        <p:style>
+          <a:lnRef idx="1">
+            <a:schemeClr val="accent1"/>
+          </a:lnRef>
+          <a:fillRef idx="3">
+            <a:schemeClr val="accent1"/>
+          </a:fillRef>
+          <a:effectRef idx="2">
+            <a:schemeClr val="accent1"/>
+          </a:effectRef>
+          <a:fontRef idx="minor">
+            <a:schemeClr val="lt1"/>
+          </a:fontRef>
+        </p:style>
+        <p:txBody>
+          <a:bodyPr rtlCol="0" anchor="ctr"/>
+          <a:lstStyle/>
+          <a:p>
+            <a:pPr algn="ctr"/>
+          </a:p>
+        </p:txBody>
+      </p:sp>
+      <p:sp>
+        <p:nvSpPr>
+          <p:cNvPr id="16" name="TextBox 15"/>
           <p:cNvSpPr txBox="1"/>
           <p:nvPr/>
         </p:nvSpPr>
         <p:spPr>
           <a:xfrm>
-            <a:off x="7562088" y="3566160"/>
-            <a:ext cx="3822192" cy="219456"/>
+            <a:off x="1207008" y="3840480"/>
+            <a:ext cx="9966960" cy="420624"/>
+          </a:xfrm>
+          <a:prstGeom prst="rect">
+            <a:avLst/>
+          </a:prstGeom>
+          <a:noFill/>
+        </p:spPr>
+        <p:txBody>
+          <a:bodyPr wrap="square" anchor="ctr" lIns="0" rIns="0" tIns="0" bIns="0">
+            <a:spAutoFit/>
+          </a:bodyPr>
+          <a:lstStyle/>
+          <a:p>
+            <a:pPr algn="l">
+              <a:lnSpc>
+                <a:spcPct val="98000"/>
+              </a:lnSpc>
+            </a:pPr>
+            <a:r>
+              <a:rPr sz="1040" b="1">
+                <a:solidFill>
+                  <a:srgbClr val="1A1A1A"/>
+                </a:solidFill>
+                <a:latin typeface="Hiragino Sans"/>
+                <a:ea typeface="Hiragino Sans"/>
+                <a:cs typeface="Hiragino Sans"/>
+              </a:rPr>
+              <a:t>校訓は「己を拓く」。校則はゆるめで、自主性を大事にする自由な空気</a:t>
+            </a:r>
+          </a:p>
+        </p:txBody>
+      </p:sp>
+      <p:sp>
+        <p:nvSpPr>
+          <p:cNvPr id="17" name="Rounded Rectangle 16"/>
+          <p:cNvSpPr/>
+          <p:nvPr/>
+        </p:nvSpPr>
+        <p:spPr>
+          <a:xfrm>
+            <a:off x="658368" y="4352544"/>
+            <a:ext cx="10863072" cy="566928"/>
+          </a:xfrm>
+          <a:prstGeom prst="roundRect">
+            <a:avLst>
+              <a:gd name="adj" fmla="val 6000"/>
+            </a:avLst>
+          </a:prstGeom>
+          <a:solidFill>
+            <a:srgbClr val="FFFFFF"/>
+          </a:solidFill>
+          <a:ln w="9525">
+            <a:solidFill>
+              <a:srgbClr val="D7DDE8"/>
+            </a:solidFill>
+          </a:ln>
+        </p:spPr>
+        <p:style>
+          <a:lnRef idx="1">
+            <a:schemeClr val="accent1"/>
+          </a:lnRef>
+          <a:fillRef idx="3">
+            <a:schemeClr val="accent1"/>
+          </a:fillRef>
+          <a:effectRef idx="2">
+            <a:schemeClr val="accent1"/>
+          </a:effectRef>
+          <a:fontRef idx="minor">
+            <a:schemeClr val="lt1"/>
+          </a:fontRef>
+        </p:style>
+        <p:txBody>
+          <a:bodyPr rtlCol="0" anchor="ctr"/>
+          <a:lstStyle/>
+          <a:p>
+            <a:pPr algn="ctr"/>
+          </a:p>
+        </p:txBody>
+      </p:sp>
+      <p:sp>
+        <p:nvSpPr>
+          <p:cNvPr id="18" name="Oval 17"/>
+          <p:cNvSpPr/>
+          <p:nvPr/>
+        </p:nvSpPr>
+        <p:spPr>
+          <a:xfrm>
+            <a:off x="896112" y="4553712"/>
+            <a:ext cx="146304" cy="146304"/>
+          </a:xfrm>
+          <a:prstGeom prst="ellipse">
+            <a:avLst/>
+          </a:prstGeom>
+          <a:solidFill>
+            <a:srgbClr val="2E8FA3"/>
+          </a:solidFill>
+          <a:ln w="9525">
+            <a:solidFill>
+              <a:srgbClr val="2E8FA3"/>
+            </a:solidFill>
+          </a:ln>
+        </p:spPr>
+        <p:style>
+          <a:lnRef idx="1">
+            <a:schemeClr val="accent1"/>
+          </a:lnRef>
+          <a:fillRef idx="3">
+            <a:schemeClr val="accent1"/>
+          </a:fillRef>
+          <a:effectRef idx="2">
+            <a:schemeClr val="accent1"/>
+          </a:effectRef>
+          <a:fontRef idx="minor">
+            <a:schemeClr val="lt1"/>
+          </a:fontRef>
+        </p:style>
+        <p:txBody>
+          <a:bodyPr rtlCol="0" anchor="ctr"/>
+          <a:lstStyle/>
+          <a:p>
+            <a:pPr algn="ctr"/>
+          </a:p>
+        </p:txBody>
+      </p:sp>
+      <p:sp>
+        <p:nvSpPr>
+          <p:cNvPr id="19" name="TextBox 18"/>
+          <p:cNvSpPr txBox="1"/>
+          <p:nvPr/>
+        </p:nvSpPr>
+        <p:spPr>
+          <a:xfrm>
+            <a:off x="1207008" y="4425696"/>
+            <a:ext cx="9966960" cy="420624"/>
+          </a:xfrm>
+          <a:prstGeom prst="rect">
+            <a:avLst/>
+          </a:prstGeom>
+          <a:noFill/>
+        </p:spPr>
+        <p:txBody>
+          <a:bodyPr wrap="square" anchor="ctr" lIns="0" rIns="0" tIns="0" bIns="0">
+            <a:spAutoFit/>
+          </a:bodyPr>
+          <a:lstStyle/>
+          <a:p>
+            <a:pPr algn="l">
+              <a:lnSpc>
+                <a:spcPct val="98000"/>
+              </a:lnSpc>
+            </a:pPr>
+            <a:r>
+              <a:rPr sz="1040" b="1">
+                <a:solidFill>
+                  <a:srgbClr val="1A1A1A"/>
+                </a:solidFill>
+                <a:latin typeface="Hiragino Sans"/>
+                <a:ea typeface="Hiragino Sans"/>
+                <a:cs typeface="Hiragino Sans"/>
+              </a:rPr>
+              <a:t>自分のペースで落ち着いて学べる環境</a:t>
+            </a:r>
+          </a:p>
+        </p:txBody>
+      </p:sp>
+      <p:sp>
+        <p:nvSpPr>
+          <p:cNvPr id="20" name="Rounded Rectangle 19"/>
+          <p:cNvSpPr/>
+          <p:nvPr/>
+        </p:nvSpPr>
+        <p:spPr>
+          <a:xfrm>
+            <a:off x="658368" y="4937760"/>
+            <a:ext cx="10863072" cy="566928"/>
+          </a:xfrm>
+          <a:prstGeom prst="roundRect">
+            <a:avLst>
+              <a:gd name="adj" fmla="val 6000"/>
+            </a:avLst>
+          </a:prstGeom>
+          <a:solidFill>
+            <a:srgbClr val="FFFFFF"/>
+          </a:solidFill>
+          <a:ln w="9525">
+            <a:solidFill>
+              <a:srgbClr val="D7DDE8"/>
+            </a:solidFill>
+          </a:ln>
+        </p:spPr>
+        <p:style>
+          <a:lnRef idx="1">
+            <a:schemeClr val="accent1"/>
+          </a:lnRef>
+          <a:fillRef idx="3">
+            <a:schemeClr val="accent1"/>
+          </a:fillRef>
+          <a:effectRef idx="2">
+            <a:schemeClr val="accent1"/>
+          </a:effectRef>
+          <a:fontRef idx="minor">
+            <a:schemeClr val="lt1"/>
+          </a:fontRef>
+        </p:style>
+        <p:txBody>
+          <a:bodyPr rtlCol="0" anchor="ctr"/>
+          <a:lstStyle/>
+          <a:p>
+            <a:pPr algn="ctr"/>
+          </a:p>
+        </p:txBody>
+      </p:sp>
+      <p:sp>
+        <p:nvSpPr>
+          <p:cNvPr id="21" name="Oval 20"/>
+          <p:cNvSpPr/>
+          <p:nvPr/>
+        </p:nvSpPr>
+        <p:spPr>
+          <a:xfrm>
+            <a:off x="896112" y="5138928"/>
+            <a:ext cx="146304" cy="146304"/>
+          </a:xfrm>
+          <a:prstGeom prst="ellipse">
+            <a:avLst/>
+          </a:prstGeom>
+          <a:solidFill>
+            <a:srgbClr val="2E8FA3"/>
+          </a:solidFill>
+          <a:ln w="9525">
+            <a:solidFill>
+              <a:srgbClr val="2E8FA3"/>
+            </a:solidFill>
+          </a:ln>
+        </p:spPr>
+        <p:style>
+          <a:lnRef idx="1">
+            <a:schemeClr val="accent1"/>
+          </a:lnRef>
+          <a:fillRef idx="3">
+            <a:schemeClr val="accent1"/>
+          </a:fillRef>
+          <a:effectRef idx="2">
+            <a:schemeClr val="accent1"/>
+          </a:effectRef>
+          <a:fontRef idx="minor">
+            <a:schemeClr val="lt1"/>
+          </a:fontRef>
+        </p:style>
+        <p:txBody>
+          <a:bodyPr rtlCol="0" anchor="ctr"/>
+          <a:lstStyle/>
+          <a:p>
+            <a:pPr algn="ctr"/>
+          </a:p>
+        </p:txBody>
+      </p:sp>
+      <p:sp>
+        <p:nvSpPr>
+          <p:cNvPr id="22" name="TextBox 21"/>
+          <p:cNvSpPr txBox="1"/>
+          <p:nvPr/>
+        </p:nvSpPr>
+        <p:spPr>
+          <a:xfrm>
+            <a:off x="1207008" y="5010912"/>
+            <a:ext cx="9966960" cy="420624"/>
+          </a:xfrm>
+          <a:prstGeom prst="rect">
+            <a:avLst/>
+          </a:prstGeom>
+          <a:noFill/>
+        </p:spPr>
+        <p:txBody>
+          <a:bodyPr wrap="square" anchor="ctr" lIns="0" rIns="0" tIns="0" bIns="0">
+            <a:spAutoFit/>
+          </a:bodyPr>
+          <a:lstStyle/>
+          <a:p>
+            <a:pPr algn="l">
+              <a:lnSpc>
+                <a:spcPct val="98000"/>
+              </a:lnSpc>
+            </a:pPr>
+            <a:r>
+              <a:rPr sz="1040" b="1">
+                <a:solidFill>
+                  <a:srgbClr val="1A1A1A"/>
+                </a:solidFill>
+                <a:latin typeface="Hiragino Sans"/>
+                <a:ea typeface="Hiragino Sans"/>
+                <a:cs typeface="Hiragino Sans"/>
+              </a:rPr>
+              <a:t>JR根岸線「本郷台」駅エリア（大船から一本）</a:t>
+            </a:r>
+          </a:p>
+        </p:txBody>
+      </p:sp>
+      <p:sp>
+        <p:nvSpPr>
+          <p:cNvPr id="23" name="Rounded Rectangle 22"/>
+          <p:cNvSpPr/>
+          <p:nvPr/>
+        </p:nvSpPr>
+        <p:spPr>
+          <a:xfrm>
+            <a:off x="658368" y="5632704"/>
+            <a:ext cx="6217920" cy="420624"/>
+          </a:xfrm>
+          <a:prstGeom prst="roundRect">
+            <a:avLst>
+              <a:gd name="adj" fmla="val 6000"/>
+            </a:avLst>
+          </a:prstGeom>
+          <a:solidFill>
+            <a:srgbClr val="FFFFFF"/>
+          </a:solidFill>
+          <a:ln w="9525">
+            <a:solidFill>
+              <a:srgbClr val="D7DDE8"/>
+            </a:solidFill>
+          </a:ln>
+        </p:spPr>
+        <p:style>
+          <a:lnRef idx="1">
+            <a:schemeClr val="accent1"/>
+          </a:lnRef>
+          <a:fillRef idx="3">
+            <a:schemeClr val="accent1"/>
+          </a:fillRef>
+          <a:effectRef idx="2">
+            <a:schemeClr val="accent1"/>
+          </a:effectRef>
+          <a:fontRef idx="minor">
+            <a:schemeClr val="lt1"/>
+          </a:fontRef>
+        </p:style>
+        <p:txBody>
+          <a:bodyPr rtlCol="0" anchor="ctr"/>
+          <a:lstStyle/>
+          <a:p>
+            <a:pPr algn="ctr"/>
+          </a:p>
+        </p:txBody>
+      </p:sp>
+      <p:sp>
+        <p:nvSpPr>
+          <p:cNvPr id="24" name="TextBox 23"/>
+          <p:cNvSpPr txBox="1"/>
+          <p:nvPr/>
+        </p:nvSpPr>
+        <p:spPr>
+          <a:xfrm>
+            <a:off x="932688" y="5760720"/>
+            <a:ext cx="5669280" cy="182880"/>
           </a:xfrm>
           <a:prstGeom prst="rect">
             <a:avLst/>
@@ -4092,28 +4364,28 @@
               </a:lnSpc>
             </a:pPr>
             <a:r>
-              <a:rPr sz="900" b="1">
+              <a:rPr sz="1300" b="1">
                 <a:solidFill>
-                  <a:srgbClr val="FFFFFF"/>
+                  <a:srgbClr val="1E6575"/>
                 </a:solidFill>
                 <a:latin typeface="Hiragino Sans"/>
                 <a:ea typeface="Hiragino Sans"/>
                 <a:cs typeface="Hiragino Sans"/>
               </a:rPr>
-              <a:t>校舎</a:t>
-            </a:r>
-          </a:p>
-        </p:txBody>
-      </p:sp>
-      <p:sp>
-        <p:nvSpPr>
-          <p:cNvPr id="19" name="TextBox 18"/>
+              <a:t>JR根岸線「本郷台」駅から（大船から一本）</a:t>
+            </a:r>
+          </a:p>
+        </p:txBody>
+      </p:sp>
+      <p:sp>
+        <p:nvSpPr>
+          <p:cNvPr id="25" name="TextBox 24"/>
           <p:cNvSpPr txBox="1"/>
           <p:nvPr/>
         </p:nvSpPr>
         <p:spPr>
           <a:xfrm>
-            <a:off x="658368" y="6236208"/>
+            <a:off x="658368" y="6327648"/>
             <a:ext cx="9875520" cy="201168"/>
           </a:xfrm>
           <a:prstGeom prst="rect">
